--- a/public/fun/pack/pptx/newspro/카드뉴스프리미엄_02_건강·안심습관_블러시샴페인.pptx
+++ b/public/fun/pack/pptx/newspro/카드뉴스프리미엄_02_건강·안심습관_블러시샴페인.pptx
@@ -113,12 +113,12 @@
   <p:extLst>
     <p:ext uri="{521415D9-36F7-43E2-AB2F-B90AF26B5E84}">
       <p14:sectionLst xmlns:p14="http://schemas.microsoft.com/office/powerpoint/2010/main">
-        <p14:section name="시작" id="{F165AF55-AC78-44A7-8F2C-35B1974A2267}">
+        <p14:section name="시작" id="{453D4C94-5027-4564-A533-5F968670C078}">
           <p14:sldIdLst>
             <p14:sldId id="256"/>
           </p14:sldIdLst>
         </p14:section>
-        <p14:section name="본문" id="{C8A8E086-2C9D-48E6-8569-7C61CE093730}">
+        <p14:section name="본문" id="{87868F85-1651-4D0B-A414-8FD1766C2355}">
           <p14:sldIdLst>
             <p14:sldId id="257"/>
             <p14:sldId id="258"/>
@@ -127,7 +127,7 @@
             <p14:sldId id="261"/>
           </p14:sldIdLst>
         </p14:section>
-        <p14:section name="마무리" id="{FBA90FB9-97FA-4A87-A160-7D36C49D7475}">
+        <p14:section name="마무리" id="{01FC8933-0C67-4731-900E-35E06E68E89C}">
           <p14:sldIdLst>
             <p14:sldId id="262"/>
           </p14:sldIdLst>
@@ -1437,7 +1437,7 @@
             </a:lvl1pPr>
           </a:lstStyle>
           <a:p>
-            <a:fld id="{EB7431F5-39BC-48A8-BC94-7CF590BAE7DD}" type="slidenum">
+            <a:fld id="{79547FCB-597F-4B0C-A585-E1B4EB55E573}" type="slidenum">
               <a:rPr lang="en-US"/>
               <a:t>‹#›</a:t>
             </a:fld>
@@ -2065,7 +2065,7 @@
             </a:lvl1pPr>
           </a:lstStyle>
           <a:p>
-            <a:fld id="{73CDEC7F-73C2-4795-AAC0-0AF13055EC1B}" type="slidenum">
+            <a:fld id="{F30E6EBB-227E-40D6-9675-BD43F30D3E92}" type="slidenum">
               <a:rPr lang="en-US"/>
               <a:t>‹#›</a:t>
             </a:fld>
@@ -2753,7 +2753,7 @@
             </a:lvl1pPr>
           </a:lstStyle>
           <a:p>
-            <a:fld id="{C012FD8B-DFB2-4C93-956F-66AC567A413F}" type="slidenum">
+            <a:fld id="{575778A4-0403-4786-B317-6430ACF26356}" type="slidenum">
               <a:rPr lang="en-US"/>
               <a:t>‹#›</a:t>
             </a:fld>
@@ -3620,7 +3620,7 @@
           <a:p>
             <a:r>
               <a:rPr lang="ko-KR"/>
-              <a:t>봄 알레르기 시즌 생활 습관</a:t>
+              <a:t>알레르기 있는 날 생활 습관</a:t>
             </a:r>
           </a:p>
         </p:txBody>
@@ -3749,7 +3749,7 @@
           <a:bodyPr/>
           <a:lstStyle/>
           <a:p>
-            <a:fld id="{CB275CC4-2D5B-4B75-B68D-D43F34D303F7}" type="slidenum">
+            <a:fld id="{71FA8EAE-FF48-4B2C-B533-DBE94F298061}" type="slidenum">
               <a:rPr lang="en-US"/>
               <a:t>‹#›</a:t>
             </a:fld>
@@ -3915,7 +3915,7 @@
           <a:bodyPr/>
           <a:lstStyle/>
           <a:p>
-            <a:fld id="{B2FAE0FC-BDA6-41F4-896B-1B4ED7B4F8DA}" type="slidenum">
+            <a:fld id="{DCABD68A-84A7-416F-A892-5CE283E5DE54}" type="slidenum">
               <a:rPr lang="en-US"/>
               <a:t>‹#›</a:t>
             </a:fld>
@@ -4081,7 +4081,7 @@
           <a:bodyPr/>
           <a:lstStyle/>
           <a:p>
-            <a:fld id="{0FB95690-F6E2-46F4-B4EB-0FC8F188A2E0}" type="slidenum">
+            <a:fld id="{27FD7CD3-DB2F-42E6-9747-C009021F9BBE}" type="slidenum">
               <a:rPr lang="en-US"/>
               <a:t>‹#›</a:t>
             </a:fld>
@@ -4247,7 +4247,7 @@
           <a:bodyPr/>
           <a:lstStyle/>
           <a:p>
-            <a:fld id="{3726850A-9E34-47D1-8013-33E0F859EDF0}" type="slidenum">
+            <a:fld id="{865602A7-707E-480C-B90C-39FBF26FA3F1}" type="slidenum">
               <a:rPr lang="en-US"/>
               <a:t>‹#›</a:t>
             </a:fld>
@@ -4413,7 +4413,7 @@
           <a:bodyPr/>
           <a:lstStyle/>
           <a:p>
-            <a:fld id="{24B3DEFD-D5C2-4CE8-BDD9-00141E7D72E4}" type="slidenum">
+            <a:fld id="{D056E855-48D9-4198-B097-4BFFD4849424}" type="slidenum">
               <a:rPr lang="en-US"/>
               <a:t>‹#›</a:t>
             </a:fld>
